--- a/assets/powerpoints/module-n3-epicerie/B4-trouver-sans-chercher.pptx
+++ b/assets/powerpoints/module-n3-epicerie/B4-trouver-sans-chercher.pptx
@@ -9381,7 +9381,25 @@
                 </a:solidFill>
                 <a:latin typeface="Verdana"/>
               </a:rPr>
-              <a:t>« C'est allée cinq, au milieu, à côté du vinaigre. » Le nombre passe en une demi-seconde, au milieu d'une phrase. C'est pour cela qu'on le &lt;b&gt;répète à voix haute&lt;/b&gt; tout de suite : « allée cinq », avant même de remercier.</a:t>
+              <a:t>« C'est allée cinq, au milieu, à côté du vinaigre. » Le nombre passe en une demi-seconde, au milieu d'une phrase. C'est pour cela qu'on le </a:t>
+            </a:r>
+            <a:r>
+              <a:rPr sz="2000" b="1" i="0">
+                <a:solidFill>
+                  <a:srgbClr val="4B4F52"/>
+                </a:solidFill>
+                <a:latin typeface="Verdana"/>
+              </a:rPr>
+              <a:t>répète à voix haute</a:t>
+            </a:r>
+            <a:r>
+              <a:rPr sz="2000" b="0" i="0">
+                <a:solidFill>
+                  <a:srgbClr val="4B4F52"/>
+                </a:solidFill>
+                <a:latin typeface="Verdana"/>
+              </a:rPr>
+              <a:t> tout de suite : « allée cinq », avant même de remercier.</a:t>
             </a:r>
           </a:p>
         </p:txBody>
